--- a/Proposal/Mtx_Model/MtxModel_pic.pptx
+++ b/Proposal/Mtx_Model/MtxModel_pic.pptx
@@ -259,7 +259,7 @@
           <a:p>
             <a:fld id="{12E27071-2B37-4670-86EE-6AF64B685DDB}" type="datetimeFigureOut">
               <a:rPr lang="en-US" smtClean="0"/>
-              <a:t>2022-03-22</a:t>
+              <a:t>2022-03-24</a:t>
             </a:fld>
             <a:endParaRPr lang="en-US"/>
           </a:p>
@@ -457,7 +457,7 @@
           <a:p>
             <a:fld id="{12E27071-2B37-4670-86EE-6AF64B685DDB}" type="datetimeFigureOut">
               <a:rPr lang="en-US" smtClean="0"/>
-              <a:t>2022-03-22</a:t>
+              <a:t>2022-03-24</a:t>
             </a:fld>
             <a:endParaRPr lang="en-US"/>
           </a:p>
@@ -665,7 +665,7 @@
           <a:p>
             <a:fld id="{12E27071-2B37-4670-86EE-6AF64B685DDB}" type="datetimeFigureOut">
               <a:rPr lang="en-US" smtClean="0"/>
-              <a:t>2022-03-22</a:t>
+              <a:t>2022-03-24</a:t>
             </a:fld>
             <a:endParaRPr lang="en-US"/>
           </a:p>
@@ -863,7 +863,7 @@
           <a:p>
             <a:fld id="{12E27071-2B37-4670-86EE-6AF64B685DDB}" type="datetimeFigureOut">
               <a:rPr lang="en-US" smtClean="0"/>
-              <a:t>2022-03-22</a:t>
+              <a:t>2022-03-24</a:t>
             </a:fld>
             <a:endParaRPr lang="en-US"/>
           </a:p>
@@ -1138,7 +1138,7 @@
           <a:p>
             <a:fld id="{12E27071-2B37-4670-86EE-6AF64B685DDB}" type="datetimeFigureOut">
               <a:rPr lang="en-US" smtClean="0"/>
-              <a:t>2022-03-22</a:t>
+              <a:t>2022-03-24</a:t>
             </a:fld>
             <a:endParaRPr lang="en-US"/>
           </a:p>
@@ -1403,7 +1403,7 @@
           <a:p>
             <a:fld id="{12E27071-2B37-4670-86EE-6AF64B685DDB}" type="datetimeFigureOut">
               <a:rPr lang="en-US" smtClean="0"/>
-              <a:t>2022-03-22</a:t>
+              <a:t>2022-03-24</a:t>
             </a:fld>
             <a:endParaRPr lang="en-US"/>
           </a:p>
@@ -1815,7 +1815,7 @@
           <a:p>
             <a:fld id="{12E27071-2B37-4670-86EE-6AF64B685DDB}" type="datetimeFigureOut">
               <a:rPr lang="en-US" smtClean="0"/>
-              <a:t>2022-03-22</a:t>
+              <a:t>2022-03-24</a:t>
             </a:fld>
             <a:endParaRPr lang="en-US"/>
           </a:p>
@@ -1956,7 +1956,7 @@
           <a:p>
             <a:fld id="{12E27071-2B37-4670-86EE-6AF64B685DDB}" type="datetimeFigureOut">
               <a:rPr lang="en-US" smtClean="0"/>
-              <a:t>2022-03-22</a:t>
+              <a:t>2022-03-24</a:t>
             </a:fld>
             <a:endParaRPr lang="en-US"/>
           </a:p>
@@ -2069,7 +2069,7 @@
           <a:p>
             <a:fld id="{12E27071-2B37-4670-86EE-6AF64B685DDB}" type="datetimeFigureOut">
               <a:rPr lang="en-US" smtClean="0"/>
-              <a:t>2022-03-22</a:t>
+              <a:t>2022-03-24</a:t>
             </a:fld>
             <a:endParaRPr lang="en-US"/>
           </a:p>
@@ -2380,7 +2380,7 @@
           <a:p>
             <a:fld id="{12E27071-2B37-4670-86EE-6AF64B685DDB}" type="datetimeFigureOut">
               <a:rPr lang="en-US" smtClean="0"/>
-              <a:t>2022-03-22</a:t>
+              <a:t>2022-03-24</a:t>
             </a:fld>
             <a:endParaRPr lang="en-US"/>
           </a:p>
@@ -2668,7 +2668,7 @@
           <a:p>
             <a:fld id="{12E27071-2B37-4670-86EE-6AF64B685DDB}" type="datetimeFigureOut">
               <a:rPr lang="en-US" smtClean="0"/>
-              <a:t>2022-03-22</a:t>
+              <a:t>2022-03-24</a:t>
             </a:fld>
             <a:endParaRPr lang="en-US"/>
           </a:p>
@@ -2909,7 +2909,7 @@
           <a:p>
             <a:fld id="{12E27071-2B37-4670-86EE-6AF64B685DDB}" type="datetimeFigureOut">
               <a:rPr lang="en-US" smtClean="0"/>
-              <a:t>2022-03-22</a:t>
+              <a:t>2022-03-24</a:t>
             </a:fld>
             <a:endParaRPr lang="en-US"/>
           </a:p>
@@ -3394,12 +3394,126 @@
           </a:prstGeom>
         </p:spPr>
       </p:pic>
+      <p:sp>
+        <p:nvSpPr>
+          <p:cNvPr id="65" name="TextBox 64">
+            <a:extLst>
+              <a:ext uri="{FF2B5EF4-FFF2-40B4-BE49-F238E27FC236}">
+                <a16:creationId xmlns:a16="http://schemas.microsoft.com/office/drawing/2014/main" id="{32E134AE-84F4-4E88-8E8D-CC37BB63BAF5}"/>
+              </a:ext>
+            </a:extLst>
+          </p:cNvPr>
+          <p:cNvSpPr txBox="1"/>
+          <p:nvPr/>
+        </p:nvSpPr>
+        <p:spPr>
+          <a:xfrm>
+            <a:off x="2032514" y="69451"/>
+            <a:ext cx="640080" cy="461665"/>
+          </a:xfrm>
+          <a:prstGeom prst="rect">
+            <a:avLst/>
+          </a:prstGeom>
+          <a:noFill/>
+        </p:spPr>
+        <p:txBody>
+          <a:bodyPr wrap="square" rtlCol="0">
+            <a:spAutoFit/>
+          </a:bodyPr>
+          <a:lstStyle/>
+          <a:p>
+            <a:r>
+              <a:rPr lang="en-US" sz="2400" dirty="0">
+                <a:latin typeface="Times New Roman" panose="02020603050405020304" pitchFamily="18" charset="0"/>
+                <a:cs typeface="Times New Roman" panose="02020603050405020304" pitchFamily="18" charset="0"/>
+              </a:rPr>
+              <a:t>a)</a:t>
+            </a:r>
+          </a:p>
+        </p:txBody>
+      </p:sp>
+      <p:sp>
+        <p:nvSpPr>
+          <p:cNvPr id="67" name="TextBox 66">
+            <a:extLst>
+              <a:ext uri="{FF2B5EF4-FFF2-40B4-BE49-F238E27FC236}">
+                <a16:creationId xmlns:a16="http://schemas.microsoft.com/office/drawing/2014/main" id="{0C43BF47-A58C-49D6-9877-701D702D69DC}"/>
+              </a:ext>
+            </a:extLst>
+          </p:cNvPr>
+          <p:cNvSpPr txBox="1"/>
+          <p:nvPr/>
+        </p:nvSpPr>
+        <p:spPr>
+          <a:xfrm>
+            <a:off x="5204681" y="3513691"/>
+            <a:ext cx="640080" cy="461665"/>
+          </a:xfrm>
+          <a:prstGeom prst="rect">
+            <a:avLst/>
+          </a:prstGeom>
+          <a:noFill/>
+        </p:spPr>
+        <p:txBody>
+          <a:bodyPr wrap="square" rtlCol="0">
+            <a:spAutoFit/>
+          </a:bodyPr>
+          <a:lstStyle/>
+          <a:p>
+            <a:r>
+              <a:rPr lang="en-US" sz="2400" dirty="0">
+                <a:latin typeface="Times New Roman" panose="02020603050405020304" pitchFamily="18" charset="0"/>
+                <a:cs typeface="Times New Roman" panose="02020603050405020304" pitchFamily="18" charset="0"/>
+              </a:rPr>
+              <a:t>c)</a:t>
+            </a:r>
+          </a:p>
+        </p:txBody>
+      </p:sp>
+      <p:sp>
+        <p:nvSpPr>
+          <p:cNvPr id="68" name="TextBox 67">
+            <a:extLst>
+              <a:ext uri="{FF2B5EF4-FFF2-40B4-BE49-F238E27FC236}">
+                <a16:creationId xmlns:a16="http://schemas.microsoft.com/office/drawing/2014/main" id="{826AB60A-84A4-43C5-BF48-0D8F6C2EF665}"/>
+              </a:ext>
+            </a:extLst>
+          </p:cNvPr>
+          <p:cNvSpPr txBox="1"/>
+          <p:nvPr/>
+        </p:nvSpPr>
+        <p:spPr>
+          <a:xfrm>
+            <a:off x="46346" y="3513691"/>
+            <a:ext cx="640080" cy="461665"/>
+          </a:xfrm>
+          <a:prstGeom prst="rect">
+            <a:avLst/>
+          </a:prstGeom>
+          <a:noFill/>
+        </p:spPr>
+        <p:txBody>
+          <a:bodyPr wrap="square" rtlCol="0">
+            <a:spAutoFit/>
+          </a:bodyPr>
+          <a:lstStyle/>
+          <a:p>
+            <a:r>
+              <a:rPr lang="en-US" sz="2400" dirty="0">
+                <a:latin typeface="Times New Roman" panose="02020603050405020304" pitchFamily="18" charset="0"/>
+                <a:cs typeface="Times New Roman" panose="02020603050405020304" pitchFamily="18" charset="0"/>
+              </a:rPr>
+              <a:t>b)</a:t>
+            </a:r>
+          </a:p>
+        </p:txBody>
+      </p:sp>
       <p:grpSp>
         <p:nvGrpSpPr>
-          <p:cNvPr id="54" name="Group 53">
-            <a:extLst>
-              <a:ext uri="{FF2B5EF4-FFF2-40B4-BE49-F238E27FC236}">
-                <a16:creationId xmlns:a16="http://schemas.microsoft.com/office/drawing/2014/main" id="{C91264B0-71EB-4156-9B70-56614F7EAA49}"/>
+          <p:cNvPr id="12" name="Group 11">
+            <a:extLst>
+              <a:ext uri="{FF2B5EF4-FFF2-40B4-BE49-F238E27FC236}">
+                <a16:creationId xmlns:a16="http://schemas.microsoft.com/office/drawing/2014/main" id="{2C9B08F7-7622-4447-B6C1-CC4BC6EFF3A4}"/>
               </a:ext>
             </a:extLst>
           </p:cNvPr>
@@ -3410,151 +3524,10 @@
           <a:xfrm>
             <a:off x="2847340" y="300284"/>
             <a:ext cx="6497320" cy="2916036"/>
-            <a:chOff x="2118360" y="436738"/>
+            <a:chOff x="2847340" y="300284"/>
             <a:chExt cx="6497320" cy="2916036"/>
           </a:xfrm>
         </p:grpSpPr>
-        <p:pic>
-          <p:nvPicPr>
-            <p:cNvPr id="55" name="Picture 2" descr="Circular Arrow Pointing To Right - Circle Arrow Png, Transparent Png -  kindpng">
-              <a:extLst>
-                <a:ext uri="{FF2B5EF4-FFF2-40B4-BE49-F238E27FC236}">
-                  <a16:creationId xmlns:a16="http://schemas.microsoft.com/office/drawing/2014/main" id="{B48CEC33-E65B-4496-87D1-4A3CF2157658}"/>
-                </a:ext>
-              </a:extLst>
-            </p:cNvPr>
-            <p:cNvPicPr>
-              <a:picLocks noChangeAspect="1" noChangeArrowheads="1"/>
-            </p:cNvPicPr>
-            <p:nvPr/>
-          </p:nvPicPr>
-          <p:blipFill>
-            <a:blip r:embed="rId4">
-              <a:extLst>
-                <a:ext uri="{28A0092B-C50C-407E-A947-70E740481C1C}">
-                  <a14:useLocalDpi xmlns:a14="http://schemas.microsoft.com/office/drawing/2010/main" val="0"/>
-                </a:ext>
-              </a:extLst>
-            </a:blip>
-            <a:srcRect/>
-            <a:stretch>
-              <a:fillRect/>
-            </a:stretch>
-          </p:blipFill>
-          <p:spPr bwMode="auto">
-            <a:xfrm rot="18138782">
-              <a:off x="4200930" y="2425238"/>
-              <a:ext cx="519848" cy="601431"/>
-            </a:xfrm>
-            <a:prstGeom prst="rect">
-              <a:avLst/>
-            </a:prstGeom>
-            <a:noFill/>
-            <a:extLst>
-              <a:ext uri="{909E8E84-426E-40DD-AFC4-6F175D3DCCD1}">
-                <a14:hiddenFill xmlns:a14="http://schemas.microsoft.com/office/drawing/2010/main">
-                  <a:solidFill>
-                    <a:srgbClr val="FFFFFF"/>
-                  </a:solidFill>
-                </a14:hiddenFill>
-              </a:ext>
-            </a:extLst>
-          </p:spPr>
-        </p:pic>
-        <p:pic>
-          <p:nvPicPr>
-            <p:cNvPr id="56" name="Picture 2" descr="Circular Arrow Pointing To Right - Circle Arrow Png, Transparent Png -  kindpng">
-              <a:extLst>
-                <a:ext uri="{FF2B5EF4-FFF2-40B4-BE49-F238E27FC236}">
-                  <a16:creationId xmlns:a16="http://schemas.microsoft.com/office/drawing/2014/main" id="{645474FD-F2C2-4F3A-AA47-C3DD543179F8}"/>
-                </a:ext>
-              </a:extLst>
-            </p:cNvPr>
-            <p:cNvPicPr>
-              <a:picLocks noChangeAspect="1" noChangeArrowheads="1"/>
-            </p:cNvPicPr>
-            <p:nvPr/>
-          </p:nvPicPr>
-          <p:blipFill>
-            <a:blip r:embed="rId4">
-              <a:extLst>
-                <a:ext uri="{28A0092B-C50C-407E-A947-70E740481C1C}">
-                  <a14:useLocalDpi xmlns:a14="http://schemas.microsoft.com/office/drawing/2010/main" val="0"/>
-                </a:ext>
-              </a:extLst>
-            </a:blip>
-            <a:srcRect/>
-            <a:stretch>
-              <a:fillRect/>
-            </a:stretch>
-          </p:blipFill>
-          <p:spPr bwMode="auto">
-            <a:xfrm rot="18138782">
-              <a:off x="6073485" y="2420505"/>
-              <a:ext cx="519848" cy="601431"/>
-            </a:xfrm>
-            <a:prstGeom prst="rect">
-              <a:avLst/>
-            </a:prstGeom>
-            <a:noFill/>
-            <a:extLst>
-              <a:ext uri="{909E8E84-426E-40DD-AFC4-6F175D3DCCD1}">
-                <a14:hiddenFill xmlns:a14="http://schemas.microsoft.com/office/drawing/2010/main">
-                  <a:solidFill>
-                    <a:srgbClr val="FFFFFF"/>
-                  </a:solidFill>
-                </a14:hiddenFill>
-              </a:ext>
-            </a:extLst>
-          </p:spPr>
-        </p:pic>
-        <p:pic>
-          <p:nvPicPr>
-            <p:cNvPr id="57" name="Picture 2" descr="Circular Arrow Pointing To Right - Circle Arrow Png, Transparent Png -  kindpng">
-              <a:extLst>
-                <a:ext uri="{FF2B5EF4-FFF2-40B4-BE49-F238E27FC236}">
-                  <a16:creationId xmlns:a16="http://schemas.microsoft.com/office/drawing/2014/main" id="{6EDA891F-C493-4B9A-8D71-010ED7F294AE}"/>
-                </a:ext>
-              </a:extLst>
-            </p:cNvPr>
-            <p:cNvPicPr>
-              <a:picLocks noChangeAspect="1" noChangeArrowheads="1"/>
-            </p:cNvPicPr>
-            <p:nvPr/>
-          </p:nvPicPr>
-          <p:blipFill>
-            <a:blip r:embed="rId4">
-              <a:extLst>
-                <a:ext uri="{28A0092B-C50C-407E-A947-70E740481C1C}">
-                  <a14:useLocalDpi xmlns:a14="http://schemas.microsoft.com/office/drawing/2010/main" val="0"/>
-                </a:ext>
-              </a:extLst>
-            </a:blip>
-            <a:srcRect/>
-            <a:stretch>
-              <a:fillRect/>
-            </a:stretch>
-          </p:blipFill>
-          <p:spPr bwMode="auto">
-            <a:xfrm rot="18138782">
-              <a:off x="7923799" y="2427274"/>
-              <a:ext cx="519848" cy="601431"/>
-            </a:xfrm>
-            <a:prstGeom prst="rect">
-              <a:avLst/>
-            </a:prstGeom>
-            <a:noFill/>
-            <a:extLst>
-              <a:ext uri="{909E8E84-426E-40DD-AFC4-6F175D3DCCD1}">
-                <a14:hiddenFill xmlns:a14="http://schemas.microsoft.com/office/drawing/2010/main">
-                  <a:solidFill>
-                    <a:srgbClr val="FFFFFF"/>
-                  </a:solidFill>
-                </a14:hiddenFill>
-              </a:ext>
-            </a:extLst>
-          </p:spPr>
-        </p:pic>
         <p:pic>
           <p:nvPicPr>
             <p:cNvPr id="1026" name="Picture 2" descr="Circular Arrow Pointing To Right - Circle Arrow Png, Transparent Png -  kindpng">
@@ -3572,6 +3545,28 @@
           <p:blipFill>
             <a:blip r:embed="rId4">
               <a:extLst>
+                <a:ext uri="{BEBA8EAE-BF5A-486C-A8C5-ECC9F3942E4B}">
+                  <a14:imgProps xmlns:a14="http://schemas.microsoft.com/office/drawing/2010/main">
+                    <a14:imgLayer r:embed="rId5">
+                      <a14:imgEffect>
+                        <a14:backgroundRemoval t="5930" b="90854" l="5349" r="93721">
+                          <a14:foregroundMark x1="50465" y1="17085" x2="50465" y2="17085"/>
+                          <a14:foregroundMark x1="45465" y1="6030" x2="45465" y2="6030"/>
+                          <a14:foregroundMark x1="33372" y1="18693" x2="33372" y2="18693"/>
+                          <a14:foregroundMark x1="21395" y1="29548" x2="21395" y2="29548"/>
+                          <a14:foregroundMark x1="92558" y1="52362" x2="92558" y2="52362"/>
+                          <a14:foregroundMark x1="83256" y1="76583" x2="83256" y2="76583"/>
+                          <a14:foregroundMark x1="88953" y1="65427" x2="88953" y2="65427"/>
+                          <a14:foregroundMark x1="93953" y1="57990" x2="93953" y2="57990"/>
+                          <a14:foregroundMark x1="89884" y1="64322" x2="89884" y2="64322"/>
+                          <a14:foregroundMark x1="5349" y1="51457" x2="5349" y2="51457"/>
+                          <a14:foregroundMark x1="58372" y1="90854" x2="58372" y2="90854"/>
+                          <a14:backgroundMark x1="60116" y1="43618" x2="60116" y2="43618"/>
+                        </a14:backgroundRemoval>
+                      </a14:imgEffect>
+                    </a14:imgLayer>
+                  </a14:imgProps>
+                </a:ext>
                 <a:ext uri="{28A0092B-C50C-407E-A947-70E740481C1C}">
                   <a14:useLocalDpi xmlns:a14="http://schemas.microsoft.com/office/drawing/2010/main" val="0"/>
                 </a:ext>
@@ -3584,7 +3579,7 @@
           </p:blipFill>
           <p:spPr bwMode="auto">
             <a:xfrm rot="18138782">
-              <a:off x="2388371" y="2427272"/>
+              <a:off x="3117351" y="2290818"/>
               <a:ext cx="519848" cy="601431"/>
             </a:xfrm>
             <a:prstGeom prst="rect">
@@ -3616,7 +3611,7 @@
           </p:nvSpPr>
           <p:spPr>
             <a:xfrm>
-              <a:off x="2118360" y="1493520"/>
+              <a:off x="2847340" y="1357066"/>
               <a:ext cx="1026160" cy="1005840"/>
             </a:xfrm>
             <a:prstGeom prst="ellipse">
@@ -3668,7 +3663,7 @@
           </p:nvSpPr>
           <p:spPr>
             <a:xfrm>
-              <a:off x="7589520" y="1493520"/>
+              <a:off x="8318500" y="1357066"/>
               <a:ext cx="1026160" cy="1005840"/>
             </a:xfrm>
             <a:prstGeom prst="ellipse">
@@ -3720,7 +3715,7 @@
           </p:nvSpPr>
           <p:spPr>
             <a:xfrm>
-              <a:off x="5765800" y="1493520"/>
+              <a:off x="6494780" y="1357066"/>
               <a:ext cx="1026160" cy="1005840"/>
             </a:xfrm>
             <a:prstGeom prst="ellipse">
@@ -3772,7 +3767,7 @@
           </p:nvSpPr>
           <p:spPr>
             <a:xfrm>
-              <a:off x="3942080" y="1493520"/>
+              <a:off x="4671060" y="1357066"/>
               <a:ext cx="1026160" cy="1005840"/>
             </a:xfrm>
             <a:prstGeom prst="ellipse">
@@ -3824,7 +3819,7 @@
           </p:nvSpPr>
           <p:spPr>
             <a:xfrm>
-              <a:off x="2196097" y="1573963"/>
+              <a:off x="2925077" y="1437509"/>
               <a:ext cx="870685" cy="830997"/>
             </a:xfrm>
             <a:prstGeom prst="rect">
@@ -3863,7 +3858,7 @@
           </p:nvSpPr>
           <p:spPr>
             <a:xfrm>
-              <a:off x="4019817" y="1573964"/>
+              <a:off x="4748797" y="1437510"/>
               <a:ext cx="870685" cy="830997"/>
             </a:xfrm>
             <a:prstGeom prst="rect">
@@ -3902,7 +3897,7 @@
           </p:nvSpPr>
           <p:spPr>
             <a:xfrm>
-              <a:off x="5843537" y="1573965"/>
+              <a:off x="6572517" y="1437511"/>
               <a:ext cx="870685" cy="830997"/>
             </a:xfrm>
             <a:prstGeom prst="rect">
@@ -3941,7 +3936,7 @@
           </p:nvSpPr>
           <p:spPr>
             <a:xfrm>
-              <a:off x="7667257" y="1573966"/>
+              <a:off x="8396237" y="1437512"/>
               <a:ext cx="870685" cy="830997"/>
             </a:xfrm>
             <a:prstGeom prst="rect">
@@ -3983,13 +3978,13 @@
           </p:nvCxnSpPr>
           <p:spPr>
             <a:xfrm>
-              <a:off x="3144520" y="1996440"/>
+              <a:off x="3873500" y="1859986"/>
               <a:ext cx="797560" cy="0"/>
             </a:xfrm>
             <a:prstGeom prst="straightConnector1">
               <a:avLst/>
             </a:prstGeom>
-            <a:ln w="38100">
+            <a:ln w="57150">
               <a:solidFill>
                 <a:schemeClr val="tx1"/>
               </a:solidFill>
@@ -4025,13 +4020,13 @@
           </p:nvCxnSpPr>
           <p:spPr>
             <a:xfrm>
-              <a:off x="4968240" y="1989461"/>
+              <a:off x="5697220" y="1853007"/>
               <a:ext cx="797560" cy="0"/>
             </a:xfrm>
             <a:prstGeom prst="straightConnector1">
               <a:avLst/>
             </a:prstGeom>
-            <a:ln w="38100">
+            <a:ln w="57150">
               <a:solidFill>
                 <a:schemeClr val="tx1"/>
               </a:solidFill>
@@ -4067,13 +4062,13 @@
           </p:nvCxnSpPr>
           <p:spPr>
             <a:xfrm>
-              <a:off x="6791960" y="1974221"/>
+              <a:off x="7520940" y="1837767"/>
               <a:ext cx="797560" cy="0"/>
             </a:xfrm>
             <a:prstGeom prst="straightConnector1">
               <a:avLst/>
             </a:prstGeom>
-            <a:ln w="38100">
+            <a:ln w="57150">
               <a:solidFill>
                 <a:schemeClr val="tx1"/>
               </a:solidFill>
@@ -4109,7 +4104,7 @@
           </p:nvSpPr>
           <p:spPr>
             <a:xfrm>
-              <a:off x="3222257" y="1534775"/>
+              <a:off x="3951237" y="1398321"/>
               <a:ext cx="510076" cy="461665"/>
             </a:xfrm>
             <a:prstGeom prst="rect">
@@ -4158,7 +4153,7 @@
           </p:nvSpPr>
           <p:spPr>
             <a:xfrm>
-              <a:off x="5111982" y="1534774"/>
+              <a:off x="5840962" y="1398320"/>
               <a:ext cx="510076" cy="461665"/>
             </a:xfrm>
             <a:prstGeom prst="rect">
@@ -4207,7 +4202,7 @@
           </p:nvSpPr>
           <p:spPr>
             <a:xfrm>
-              <a:off x="6869697" y="1534775"/>
+              <a:off x="7598677" y="1398321"/>
               <a:ext cx="510076" cy="461665"/>
             </a:xfrm>
             <a:prstGeom prst="rect">
@@ -4259,7 +4254,7 @@
           </p:nvCxnSpPr>
           <p:spPr>
             <a:xfrm rot="16200000" flipV="1">
-              <a:off x="5367020" y="-1242060"/>
+              <a:off x="6096000" y="-1378514"/>
               <a:ext cx="12700" cy="5471160"/>
             </a:xfrm>
             <a:prstGeom prst="curvedConnector3">
@@ -4267,7 +4262,7 @@
                 <a:gd name="adj1" fmla="val 4840000"/>
               </a:avLst>
             </a:prstGeom>
-            <a:ln w="38100">
+            <a:ln w="57150">
               <a:solidFill>
                 <a:schemeClr val="tx1"/>
               </a:solidFill>
@@ -4303,7 +4298,7 @@
           </p:nvSpPr>
           <p:spPr>
             <a:xfrm>
-              <a:off x="5059559" y="436738"/>
+              <a:off x="5788539" y="300284"/>
               <a:ext cx="458780" cy="461665"/>
             </a:xfrm>
             <a:prstGeom prst="rect">
@@ -4352,7 +4347,7 @@
           </p:nvSpPr>
           <p:spPr>
             <a:xfrm>
-              <a:off x="2417556" y="2875539"/>
+              <a:off x="3146536" y="2739085"/>
               <a:ext cx="510076" cy="461665"/>
             </a:xfrm>
             <a:prstGeom prst="rect">
@@ -4401,7 +4396,7 @@
           </p:nvSpPr>
           <p:spPr>
             <a:xfrm>
-              <a:off x="4220663" y="2870806"/>
+              <a:off x="4949643" y="2734352"/>
               <a:ext cx="510076" cy="461665"/>
             </a:xfrm>
             <a:prstGeom prst="rect">
@@ -4450,7 +4445,7 @@
           </p:nvSpPr>
           <p:spPr>
             <a:xfrm>
-              <a:off x="6078371" y="2891108"/>
+              <a:off x="6807351" y="2754654"/>
               <a:ext cx="510076" cy="461665"/>
             </a:xfrm>
             <a:prstGeom prst="rect">
@@ -4499,7 +4494,7 @@
           </p:nvSpPr>
           <p:spPr>
             <a:xfrm>
-              <a:off x="7928685" y="2891109"/>
+              <a:off x="8657665" y="2754655"/>
               <a:ext cx="510076" cy="461665"/>
             </a:xfrm>
             <a:prstGeom prst="rect">
@@ -4534,121 +4529,214 @@
             </a:p>
           </p:txBody>
         </p:sp>
+        <p:pic>
+          <p:nvPicPr>
+            <p:cNvPr id="43" name="Picture 2" descr="Circular Arrow Pointing To Right - Circle Arrow Png, Transparent Png -  kindpng">
+              <a:extLst>
+                <a:ext uri="{FF2B5EF4-FFF2-40B4-BE49-F238E27FC236}">
+                  <a16:creationId xmlns:a16="http://schemas.microsoft.com/office/drawing/2014/main" id="{3D5950B4-88BF-41DA-BD0F-56A36043F772}"/>
+                </a:ext>
+              </a:extLst>
+            </p:cNvPr>
+            <p:cNvPicPr>
+              <a:picLocks noChangeAspect="1" noChangeArrowheads="1"/>
+            </p:cNvPicPr>
+            <p:nvPr/>
+          </p:nvPicPr>
+          <p:blipFill>
+            <a:blip r:embed="rId4">
+              <a:extLst>
+                <a:ext uri="{BEBA8EAE-BF5A-486C-A8C5-ECC9F3942E4B}">
+                  <a14:imgProps xmlns:a14="http://schemas.microsoft.com/office/drawing/2010/main">
+                    <a14:imgLayer r:embed="rId5">
+                      <a14:imgEffect>
+                        <a14:backgroundRemoval t="5930" b="90854" l="5349" r="93721">
+                          <a14:foregroundMark x1="50465" y1="17085" x2="50465" y2="17085"/>
+                          <a14:foregroundMark x1="45465" y1="6030" x2="45465" y2="6030"/>
+                          <a14:foregroundMark x1="33372" y1="18693" x2="33372" y2="18693"/>
+                          <a14:foregroundMark x1="21395" y1="29548" x2="21395" y2="29548"/>
+                          <a14:foregroundMark x1="92558" y1="52362" x2="92558" y2="52362"/>
+                          <a14:foregroundMark x1="83256" y1="76583" x2="83256" y2="76583"/>
+                          <a14:foregroundMark x1="88953" y1="65427" x2="88953" y2="65427"/>
+                          <a14:foregroundMark x1="93953" y1="57990" x2="93953" y2="57990"/>
+                          <a14:foregroundMark x1="89884" y1="64322" x2="89884" y2="64322"/>
+                          <a14:foregroundMark x1="5349" y1="51457" x2="5349" y2="51457"/>
+                          <a14:foregroundMark x1="58372" y1="90854" x2="58372" y2="90854"/>
+                          <a14:backgroundMark x1="60116" y1="43618" x2="60116" y2="43618"/>
+                        </a14:backgroundRemoval>
+                      </a14:imgEffect>
+                    </a14:imgLayer>
+                  </a14:imgProps>
+                </a:ext>
+                <a:ext uri="{28A0092B-C50C-407E-A947-70E740481C1C}">
+                  <a14:useLocalDpi xmlns:a14="http://schemas.microsoft.com/office/drawing/2010/main" val="0"/>
+                </a:ext>
+              </a:extLst>
+            </a:blip>
+            <a:srcRect/>
+            <a:stretch>
+              <a:fillRect/>
+            </a:stretch>
+          </p:blipFill>
+          <p:spPr bwMode="auto">
+            <a:xfrm rot="18138782">
+              <a:off x="4931946" y="2290209"/>
+              <a:ext cx="519848" cy="601431"/>
+            </a:xfrm>
+            <a:prstGeom prst="rect">
+              <a:avLst/>
+            </a:prstGeom>
+            <a:noFill/>
+            <a:extLst>
+              <a:ext uri="{909E8E84-426E-40DD-AFC4-6F175D3DCCD1}">
+                <a14:hiddenFill xmlns:a14="http://schemas.microsoft.com/office/drawing/2010/main">
+                  <a:solidFill>
+                    <a:srgbClr val="FFFFFF"/>
+                  </a:solidFill>
+                </a14:hiddenFill>
+              </a:ext>
+            </a:extLst>
+          </p:spPr>
+        </p:pic>
+        <p:pic>
+          <p:nvPicPr>
+            <p:cNvPr id="44" name="Picture 2" descr="Circular Arrow Pointing To Right - Circle Arrow Png, Transparent Png -  kindpng">
+              <a:extLst>
+                <a:ext uri="{FF2B5EF4-FFF2-40B4-BE49-F238E27FC236}">
+                  <a16:creationId xmlns:a16="http://schemas.microsoft.com/office/drawing/2014/main" id="{6B94B06B-89E6-4912-8472-BB155C19F754}"/>
+                </a:ext>
+              </a:extLst>
+            </p:cNvPr>
+            <p:cNvPicPr>
+              <a:picLocks noChangeAspect="1" noChangeArrowheads="1"/>
+            </p:cNvPicPr>
+            <p:nvPr/>
+          </p:nvPicPr>
+          <p:blipFill>
+            <a:blip r:embed="rId4">
+              <a:extLst>
+                <a:ext uri="{BEBA8EAE-BF5A-486C-A8C5-ECC9F3942E4B}">
+                  <a14:imgProps xmlns:a14="http://schemas.microsoft.com/office/drawing/2010/main">
+                    <a14:imgLayer r:embed="rId5">
+                      <a14:imgEffect>
+                        <a14:backgroundRemoval t="5930" b="90854" l="5349" r="93721">
+                          <a14:foregroundMark x1="50465" y1="17085" x2="50465" y2="17085"/>
+                          <a14:foregroundMark x1="45465" y1="6030" x2="45465" y2="6030"/>
+                          <a14:foregroundMark x1="33372" y1="18693" x2="33372" y2="18693"/>
+                          <a14:foregroundMark x1="21395" y1="29548" x2="21395" y2="29548"/>
+                          <a14:foregroundMark x1="92558" y1="52362" x2="92558" y2="52362"/>
+                          <a14:foregroundMark x1="83256" y1="76583" x2="83256" y2="76583"/>
+                          <a14:foregroundMark x1="88953" y1="65427" x2="88953" y2="65427"/>
+                          <a14:foregroundMark x1="93953" y1="57990" x2="93953" y2="57990"/>
+                          <a14:foregroundMark x1="89884" y1="64322" x2="89884" y2="64322"/>
+                          <a14:foregroundMark x1="5349" y1="51457" x2="5349" y2="51457"/>
+                          <a14:foregroundMark x1="58372" y1="90854" x2="58372" y2="90854"/>
+                          <a14:backgroundMark x1="60116" y1="43618" x2="60116" y2="43618"/>
+                        </a14:backgroundRemoval>
+                      </a14:imgEffect>
+                    </a14:imgLayer>
+                  </a14:imgProps>
+                </a:ext>
+                <a:ext uri="{28A0092B-C50C-407E-A947-70E740481C1C}">
+                  <a14:useLocalDpi xmlns:a14="http://schemas.microsoft.com/office/drawing/2010/main" val="0"/>
+                </a:ext>
+              </a:extLst>
+            </a:blip>
+            <a:srcRect/>
+            <a:stretch>
+              <a:fillRect/>
+            </a:stretch>
+          </p:blipFill>
+          <p:spPr bwMode="auto">
+            <a:xfrm rot="18138782">
+              <a:off x="6747935" y="2290211"/>
+              <a:ext cx="519848" cy="601431"/>
+            </a:xfrm>
+            <a:prstGeom prst="rect">
+              <a:avLst/>
+            </a:prstGeom>
+            <a:noFill/>
+            <a:extLst>
+              <a:ext uri="{909E8E84-426E-40DD-AFC4-6F175D3DCCD1}">
+                <a14:hiddenFill xmlns:a14="http://schemas.microsoft.com/office/drawing/2010/main">
+                  <a:solidFill>
+                    <a:srgbClr val="FFFFFF"/>
+                  </a:solidFill>
+                </a14:hiddenFill>
+              </a:ext>
+            </a:extLst>
+          </p:spPr>
+        </p:pic>
+        <p:pic>
+          <p:nvPicPr>
+            <p:cNvPr id="45" name="Picture 2" descr="Circular Arrow Pointing To Right - Circle Arrow Png, Transparent Png -  kindpng">
+              <a:extLst>
+                <a:ext uri="{FF2B5EF4-FFF2-40B4-BE49-F238E27FC236}">
+                  <a16:creationId xmlns:a16="http://schemas.microsoft.com/office/drawing/2014/main" id="{CF4D2F89-6A3E-413C-A477-BD870B77F05A}"/>
+                </a:ext>
+              </a:extLst>
+            </p:cNvPr>
+            <p:cNvPicPr>
+              <a:picLocks noChangeAspect="1" noChangeArrowheads="1"/>
+            </p:cNvPicPr>
+            <p:nvPr/>
+          </p:nvPicPr>
+          <p:blipFill>
+            <a:blip r:embed="rId4">
+              <a:extLst>
+                <a:ext uri="{BEBA8EAE-BF5A-486C-A8C5-ECC9F3942E4B}">
+                  <a14:imgProps xmlns:a14="http://schemas.microsoft.com/office/drawing/2010/main">
+                    <a14:imgLayer r:embed="rId5">
+                      <a14:imgEffect>
+                        <a14:backgroundRemoval t="5930" b="90854" l="5349" r="93721">
+                          <a14:foregroundMark x1="50465" y1="17085" x2="50465" y2="17085"/>
+                          <a14:foregroundMark x1="45465" y1="6030" x2="45465" y2="6030"/>
+                          <a14:foregroundMark x1="33372" y1="18693" x2="33372" y2="18693"/>
+                          <a14:foregroundMark x1="21395" y1="29548" x2="21395" y2="29548"/>
+                          <a14:foregroundMark x1="92558" y1="52362" x2="92558" y2="52362"/>
+                          <a14:foregroundMark x1="83256" y1="76583" x2="83256" y2="76583"/>
+                          <a14:foregroundMark x1="88953" y1="65427" x2="88953" y2="65427"/>
+                          <a14:foregroundMark x1="93953" y1="57990" x2="93953" y2="57990"/>
+                          <a14:foregroundMark x1="89884" y1="64322" x2="89884" y2="64322"/>
+                          <a14:foregroundMark x1="5349" y1="51457" x2="5349" y2="51457"/>
+                          <a14:foregroundMark x1="58372" y1="90854" x2="58372" y2="90854"/>
+                          <a14:backgroundMark x1="60116" y1="43618" x2="60116" y2="43618"/>
+                        </a14:backgroundRemoval>
+                      </a14:imgEffect>
+                    </a14:imgLayer>
+                  </a14:imgProps>
+                </a:ext>
+                <a:ext uri="{28A0092B-C50C-407E-A947-70E740481C1C}">
+                  <a14:useLocalDpi xmlns:a14="http://schemas.microsoft.com/office/drawing/2010/main" val="0"/>
+                </a:ext>
+              </a:extLst>
+            </a:blip>
+            <a:srcRect/>
+            <a:stretch>
+              <a:fillRect/>
+            </a:stretch>
+          </p:blipFill>
+          <p:spPr bwMode="auto">
+            <a:xfrm rot="18138782">
+              <a:off x="8578005" y="2290819"/>
+              <a:ext cx="519848" cy="601431"/>
+            </a:xfrm>
+            <a:prstGeom prst="rect">
+              <a:avLst/>
+            </a:prstGeom>
+            <a:noFill/>
+            <a:extLst>
+              <a:ext uri="{909E8E84-426E-40DD-AFC4-6F175D3DCCD1}">
+                <a14:hiddenFill xmlns:a14="http://schemas.microsoft.com/office/drawing/2010/main">
+                  <a:solidFill>
+                    <a:srgbClr val="FFFFFF"/>
+                  </a:solidFill>
+                </a14:hiddenFill>
+              </a:ext>
+            </a:extLst>
+          </p:spPr>
+        </p:pic>
       </p:grpSp>
-      <p:sp>
-        <p:nvSpPr>
-          <p:cNvPr id="65" name="TextBox 64">
-            <a:extLst>
-              <a:ext uri="{FF2B5EF4-FFF2-40B4-BE49-F238E27FC236}">
-                <a16:creationId xmlns:a16="http://schemas.microsoft.com/office/drawing/2014/main" id="{32E134AE-84F4-4E88-8E8D-CC37BB63BAF5}"/>
-              </a:ext>
-            </a:extLst>
-          </p:cNvPr>
-          <p:cNvSpPr txBox="1"/>
-          <p:nvPr/>
-        </p:nvSpPr>
-        <p:spPr>
-          <a:xfrm>
-            <a:off x="2032514" y="69451"/>
-            <a:ext cx="640080" cy="461665"/>
-          </a:xfrm>
-          <a:prstGeom prst="rect">
-            <a:avLst/>
-          </a:prstGeom>
-          <a:noFill/>
-        </p:spPr>
-        <p:txBody>
-          <a:bodyPr wrap="square" rtlCol="0">
-            <a:spAutoFit/>
-          </a:bodyPr>
-          <a:lstStyle/>
-          <a:p>
-            <a:r>
-              <a:rPr lang="en-US" sz="2400" dirty="0">
-                <a:latin typeface="Times New Roman" panose="02020603050405020304" pitchFamily="18" charset="0"/>
-                <a:cs typeface="Times New Roman" panose="02020603050405020304" pitchFamily="18" charset="0"/>
-              </a:rPr>
-              <a:t>a)</a:t>
-            </a:r>
-          </a:p>
-        </p:txBody>
-      </p:sp>
-      <p:sp>
-        <p:nvSpPr>
-          <p:cNvPr id="67" name="TextBox 66">
-            <a:extLst>
-              <a:ext uri="{FF2B5EF4-FFF2-40B4-BE49-F238E27FC236}">
-                <a16:creationId xmlns:a16="http://schemas.microsoft.com/office/drawing/2014/main" id="{0C43BF47-A58C-49D6-9877-701D702D69DC}"/>
-              </a:ext>
-            </a:extLst>
-          </p:cNvPr>
-          <p:cNvSpPr txBox="1"/>
-          <p:nvPr/>
-        </p:nvSpPr>
-        <p:spPr>
-          <a:xfrm>
-            <a:off x="5204681" y="3513691"/>
-            <a:ext cx="640080" cy="461665"/>
-          </a:xfrm>
-          <a:prstGeom prst="rect">
-            <a:avLst/>
-          </a:prstGeom>
-          <a:noFill/>
-        </p:spPr>
-        <p:txBody>
-          <a:bodyPr wrap="square" rtlCol="0">
-            <a:spAutoFit/>
-          </a:bodyPr>
-          <a:lstStyle/>
-          <a:p>
-            <a:r>
-              <a:rPr lang="en-US" sz="2400" dirty="0">
-                <a:latin typeface="Times New Roman" panose="02020603050405020304" pitchFamily="18" charset="0"/>
-                <a:cs typeface="Times New Roman" panose="02020603050405020304" pitchFamily="18" charset="0"/>
-              </a:rPr>
-              <a:t>c)</a:t>
-            </a:r>
-          </a:p>
-        </p:txBody>
-      </p:sp>
-      <p:sp>
-        <p:nvSpPr>
-          <p:cNvPr id="68" name="TextBox 67">
-            <a:extLst>
-              <a:ext uri="{FF2B5EF4-FFF2-40B4-BE49-F238E27FC236}">
-                <a16:creationId xmlns:a16="http://schemas.microsoft.com/office/drawing/2014/main" id="{826AB60A-84A4-43C5-BF48-0D8F6C2EF665}"/>
-              </a:ext>
-            </a:extLst>
-          </p:cNvPr>
-          <p:cNvSpPr txBox="1"/>
-          <p:nvPr/>
-        </p:nvSpPr>
-        <p:spPr>
-          <a:xfrm>
-            <a:off x="46346" y="3513691"/>
-            <a:ext cx="640080" cy="461665"/>
-          </a:xfrm>
-          <a:prstGeom prst="rect">
-            <a:avLst/>
-          </a:prstGeom>
-          <a:noFill/>
-        </p:spPr>
-        <p:txBody>
-          <a:bodyPr wrap="square" rtlCol="0">
-            <a:spAutoFit/>
-          </a:bodyPr>
-          <a:lstStyle/>
-          <a:p>
-            <a:r>
-              <a:rPr lang="en-US" sz="2400" dirty="0">
-                <a:latin typeface="Times New Roman" panose="02020603050405020304" pitchFamily="18" charset="0"/>
-                <a:cs typeface="Times New Roman" panose="02020603050405020304" pitchFamily="18" charset="0"/>
-              </a:rPr>
-              <a:t>b)</a:t>
-            </a:r>
-          </a:p>
-        </p:txBody>
-      </p:sp>
     </p:spTree>
     <p:extLst>
       <p:ext uri="{BB962C8B-B14F-4D97-AF65-F5344CB8AC3E}">
